--- a/恩典之路(崇拜版).pptx
+++ b/恩典之路(崇拜版).pptx
@@ -111,7 +111,7 @@
   </p:defaultTextStyle>
   <p:extLst>
     <p:ext uri="{EFAFB233-063F-42B5-8137-9DF3F51BA10A}">
-      <p15:sldGuideLst xmlns:p15="http://schemas.microsoft.com/office/powerpoint/2012/main"/>
+      <p15:sldGuideLst xmlns:p15="http://schemas.microsoft.com/office/powerpoint/2012/main" xmlns=""/>
     </p:ext>
   </p:extLst>
 </p:presentation>
@@ -298,7 +298,8 @@
           <a:p>
             <a:fld id="{44442084-CD32-4B52-A5E8-3FB177862133}" type="datetimeFigureOut">
               <a:rPr lang="en-US" smtClean="0"/>
-              <a:t>1/7/2023</a:t>
+              <a:pPr/>
+              <a:t>7/30/2024</a:t>
             </a:fld>
             <a:endParaRPr lang="en-US"/>
           </a:p>
@@ -340,6 +341,7 @@
           <a:p>
             <a:fld id="{C3D15093-A077-459F-85BC-3B708B9DBCBD}" type="slidenum">
               <a:rPr lang="en-US" smtClean="0"/>
+              <a:pPr/>
               <a:t>‹#›</a:t>
             </a:fld>
             <a:endParaRPr lang="en-US"/>
@@ -349,7 +351,7 @@
     </p:spTree>
     <p:extLst>
       <p:ext uri="{BB962C8B-B14F-4D97-AF65-F5344CB8AC3E}">
-        <p14:creationId xmlns:p14="http://schemas.microsoft.com/office/powerpoint/2010/main" val="3070208"/>
+        <p14:creationId xmlns:p14="http://schemas.microsoft.com/office/powerpoint/2010/main" xmlns="" val="3070208"/>
       </p:ext>
     </p:extLst>
   </p:cSld>
@@ -468,7 +470,8 @@
           <a:p>
             <a:fld id="{44442084-CD32-4B52-A5E8-3FB177862133}" type="datetimeFigureOut">
               <a:rPr lang="en-US" smtClean="0"/>
-              <a:t>1/7/2023</a:t>
+              <a:pPr/>
+              <a:t>7/30/2024</a:t>
             </a:fld>
             <a:endParaRPr lang="en-US"/>
           </a:p>
@@ -510,6 +513,7 @@
           <a:p>
             <a:fld id="{C3D15093-A077-459F-85BC-3B708B9DBCBD}" type="slidenum">
               <a:rPr lang="en-US" smtClean="0"/>
+              <a:pPr/>
               <a:t>‹#›</a:t>
             </a:fld>
             <a:endParaRPr lang="en-US"/>
@@ -519,7 +523,7 @@
     </p:spTree>
     <p:extLst>
       <p:ext uri="{BB962C8B-B14F-4D97-AF65-F5344CB8AC3E}">
-        <p14:creationId xmlns:p14="http://schemas.microsoft.com/office/powerpoint/2010/main" val="2978787566"/>
+        <p14:creationId xmlns:p14="http://schemas.microsoft.com/office/powerpoint/2010/main" xmlns="" val="2978787566"/>
       </p:ext>
     </p:extLst>
   </p:cSld>
@@ -648,7 +652,8 @@
           <a:p>
             <a:fld id="{44442084-CD32-4B52-A5E8-3FB177862133}" type="datetimeFigureOut">
               <a:rPr lang="en-US" smtClean="0"/>
-              <a:t>1/7/2023</a:t>
+              <a:pPr/>
+              <a:t>7/30/2024</a:t>
             </a:fld>
             <a:endParaRPr lang="en-US"/>
           </a:p>
@@ -690,6 +695,7 @@
           <a:p>
             <a:fld id="{C3D15093-A077-459F-85BC-3B708B9DBCBD}" type="slidenum">
               <a:rPr lang="en-US" smtClean="0"/>
+              <a:pPr/>
               <a:t>‹#›</a:t>
             </a:fld>
             <a:endParaRPr lang="en-US"/>
@@ -699,7 +705,7 @@
     </p:spTree>
     <p:extLst>
       <p:ext uri="{BB962C8B-B14F-4D97-AF65-F5344CB8AC3E}">
-        <p14:creationId xmlns:p14="http://schemas.microsoft.com/office/powerpoint/2010/main" val="2265252588"/>
+        <p14:creationId xmlns:p14="http://schemas.microsoft.com/office/powerpoint/2010/main" xmlns="" val="2265252588"/>
       </p:ext>
     </p:extLst>
   </p:cSld>
@@ -818,7 +824,8 @@
           <a:p>
             <a:fld id="{44442084-CD32-4B52-A5E8-3FB177862133}" type="datetimeFigureOut">
               <a:rPr lang="en-US" smtClean="0"/>
-              <a:t>1/7/2023</a:t>
+              <a:pPr/>
+              <a:t>7/30/2024</a:t>
             </a:fld>
             <a:endParaRPr lang="en-US"/>
           </a:p>
@@ -860,6 +867,7 @@
           <a:p>
             <a:fld id="{C3D15093-A077-459F-85BC-3B708B9DBCBD}" type="slidenum">
               <a:rPr lang="en-US" smtClean="0"/>
+              <a:pPr/>
               <a:t>‹#›</a:t>
             </a:fld>
             <a:endParaRPr lang="en-US"/>
@@ -869,7 +877,7 @@
     </p:spTree>
     <p:extLst>
       <p:ext uri="{BB962C8B-B14F-4D97-AF65-F5344CB8AC3E}">
-        <p14:creationId xmlns:p14="http://schemas.microsoft.com/office/powerpoint/2010/main" val="3764252851"/>
+        <p14:creationId xmlns:p14="http://schemas.microsoft.com/office/powerpoint/2010/main" xmlns="" val="3764252851"/>
       </p:ext>
     </p:extLst>
   </p:cSld>
@@ -1064,7 +1072,8 @@
           <a:p>
             <a:fld id="{44442084-CD32-4B52-A5E8-3FB177862133}" type="datetimeFigureOut">
               <a:rPr lang="en-US" smtClean="0"/>
-              <a:t>1/7/2023</a:t>
+              <a:pPr/>
+              <a:t>7/30/2024</a:t>
             </a:fld>
             <a:endParaRPr lang="en-US"/>
           </a:p>
@@ -1106,6 +1115,7 @@
           <a:p>
             <a:fld id="{C3D15093-A077-459F-85BC-3B708B9DBCBD}" type="slidenum">
               <a:rPr lang="en-US" smtClean="0"/>
+              <a:pPr/>
               <a:t>‹#›</a:t>
             </a:fld>
             <a:endParaRPr lang="en-US"/>
@@ -1115,7 +1125,7 @@
     </p:spTree>
     <p:extLst>
       <p:ext uri="{BB962C8B-B14F-4D97-AF65-F5344CB8AC3E}">
-        <p14:creationId xmlns:p14="http://schemas.microsoft.com/office/powerpoint/2010/main" val="43151196"/>
+        <p14:creationId xmlns:p14="http://schemas.microsoft.com/office/powerpoint/2010/main" xmlns="" val="43151196"/>
       </p:ext>
     </p:extLst>
   </p:cSld>
@@ -1352,7 +1362,8 @@
           <a:p>
             <a:fld id="{44442084-CD32-4B52-A5E8-3FB177862133}" type="datetimeFigureOut">
               <a:rPr lang="en-US" smtClean="0"/>
-              <a:t>1/7/2023</a:t>
+              <a:pPr/>
+              <a:t>7/30/2024</a:t>
             </a:fld>
             <a:endParaRPr lang="en-US"/>
           </a:p>
@@ -1394,6 +1405,7 @@
           <a:p>
             <a:fld id="{C3D15093-A077-459F-85BC-3B708B9DBCBD}" type="slidenum">
               <a:rPr lang="en-US" smtClean="0"/>
+              <a:pPr/>
               <a:t>‹#›</a:t>
             </a:fld>
             <a:endParaRPr lang="en-US"/>
@@ -1403,7 +1415,7 @@
     </p:spTree>
     <p:extLst>
       <p:ext uri="{BB962C8B-B14F-4D97-AF65-F5344CB8AC3E}">
-        <p14:creationId xmlns:p14="http://schemas.microsoft.com/office/powerpoint/2010/main" val="170918205"/>
+        <p14:creationId xmlns:p14="http://schemas.microsoft.com/office/powerpoint/2010/main" xmlns="" val="170918205"/>
       </p:ext>
     </p:extLst>
   </p:cSld>
@@ -1774,7 +1786,8 @@
           <a:p>
             <a:fld id="{44442084-CD32-4B52-A5E8-3FB177862133}" type="datetimeFigureOut">
               <a:rPr lang="en-US" smtClean="0"/>
-              <a:t>1/7/2023</a:t>
+              <a:pPr/>
+              <a:t>7/30/2024</a:t>
             </a:fld>
             <a:endParaRPr lang="en-US"/>
           </a:p>
@@ -1816,6 +1829,7 @@
           <a:p>
             <a:fld id="{C3D15093-A077-459F-85BC-3B708B9DBCBD}" type="slidenum">
               <a:rPr lang="en-US" smtClean="0"/>
+              <a:pPr/>
               <a:t>‹#›</a:t>
             </a:fld>
             <a:endParaRPr lang="en-US"/>
@@ -1825,7 +1839,7 @@
     </p:spTree>
     <p:extLst>
       <p:ext uri="{BB962C8B-B14F-4D97-AF65-F5344CB8AC3E}">
-        <p14:creationId xmlns:p14="http://schemas.microsoft.com/office/powerpoint/2010/main" val="3237070094"/>
+        <p14:creationId xmlns:p14="http://schemas.microsoft.com/office/powerpoint/2010/main" xmlns="" val="3237070094"/>
       </p:ext>
     </p:extLst>
   </p:cSld>
@@ -1892,7 +1906,8 @@
           <a:p>
             <a:fld id="{44442084-CD32-4B52-A5E8-3FB177862133}" type="datetimeFigureOut">
               <a:rPr lang="en-US" smtClean="0"/>
-              <a:t>1/7/2023</a:t>
+              <a:pPr/>
+              <a:t>7/30/2024</a:t>
             </a:fld>
             <a:endParaRPr lang="en-US"/>
           </a:p>
@@ -1934,6 +1949,7 @@
           <a:p>
             <a:fld id="{C3D15093-A077-459F-85BC-3B708B9DBCBD}" type="slidenum">
               <a:rPr lang="en-US" smtClean="0"/>
+              <a:pPr/>
               <a:t>‹#›</a:t>
             </a:fld>
             <a:endParaRPr lang="en-US"/>
@@ -1943,7 +1959,7 @@
     </p:spTree>
     <p:extLst>
       <p:ext uri="{BB962C8B-B14F-4D97-AF65-F5344CB8AC3E}">
-        <p14:creationId xmlns:p14="http://schemas.microsoft.com/office/powerpoint/2010/main" val="1693032438"/>
+        <p14:creationId xmlns:p14="http://schemas.microsoft.com/office/powerpoint/2010/main" xmlns="" val="1693032438"/>
       </p:ext>
     </p:extLst>
   </p:cSld>
@@ -1987,7 +2003,8 @@
           <a:p>
             <a:fld id="{44442084-CD32-4B52-A5E8-3FB177862133}" type="datetimeFigureOut">
               <a:rPr lang="en-US" smtClean="0"/>
-              <a:t>1/7/2023</a:t>
+              <a:pPr/>
+              <a:t>7/30/2024</a:t>
             </a:fld>
             <a:endParaRPr lang="en-US"/>
           </a:p>
@@ -2029,6 +2046,7 @@
           <a:p>
             <a:fld id="{C3D15093-A077-459F-85BC-3B708B9DBCBD}" type="slidenum">
               <a:rPr lang="en-US" smtClean="0"/>
+              <a:pPr/>
               <a:t>‹#›</a:t>
             </a:fld>
             <a:endParaRPr lang="en-US"/>
@@ -2038,7 +2056,7 @@
     </p:spTree>
     <p:extLst>
       <p:ext uri="{BB962C8B-B14F-4D97-AF65-F5344CB8AC3E}">
-        <p14:creationId xmlns:p14="http://schemas.microsoft.com/office/powerpoint/2010/main" val="2306385417"/>
+        <p14:creationId xmlns:p14="http://schemas.microsoft.com/office/powerpoint/2010/main" xmlns="" val="2306385417"/>
       </p:ext>
     </p:extLst>
   </p:cSld>
@@ -2264,7 +2282,8 @@
           <a:p>
             <a:fld id="{44442084-CD32-4B52-A5E8-3FB177862133}" type="datetimeFigureOut">
               <a:rPr lang="en-US" smtClean="0"/>
-              <a:t>1/7/2023</a:t>
+              <a:pPr/>
+              <a:t>7/30/2024</a:t>
             </a:fld>
             <a:endParaRPr lang="en-US"/>
           </a:p>
@@ -2306,6 +2325,7 @@
           <a:p>
             <a:fld id="{C3D15093-A077-459F-85BC-3B708B9DBCBD}" type="slidenum">
               <a:rPr lang="en-US" smtClean="0"/>
+              <a:pPr/>
               <a:t>‹#›</a:t>
             </a:fld>
             <a:endParaRPr lang="en-US"/>
@@ -2315,7 +2335,7 @@
     </p:spTree>
     <p:extLst>
       <p:ext uri="{BB962C8B-B14F-4D97-AF65-F5344CB8AC3E}">
-        <p14:creationId xmlns:p14="http://schemas.microsoft.com/office/powerpoint/2010/main" val="1602688986"/>
+        <p14:creationId xmlns:p14="http://schemas.microsoft.com/office/powerpoint/2010/main" xmlns="" val="1602688986"/>
       </p:ext>
     </p:extLst>
   </p:cSld>
@@ -2521,7 +2541,8 @@
           <a:p>
             <a:fld id="{44442084-CD32-4B52-A5E8-3FB177862133}" type="datetimeFigureOut">
               <a:rPr lang="en-US" smtClean="0"/>
-              <a:t>1/7/2023</a:t>
+              <a:pPr/>
+              <a:t>7/30/2024</a:t>
             </a:fld>
             <a:endParaRPr lang="en-US"/>
           </a:p>
@@ -2563,6 +2584,7 @@
           <a:p>
             <a:fld id="{C3D15093-A077-459F-85BC-3B708B9DBCBD}" type="slidenum">
               <a:rPr lang="en-US" smtClean="0"/>
+              <a:pPr/>
               <a:t>‹#›</a:t>
             </a:fld>
             <a:endParaRPr lang="en-US"/>
@@ -2572,7 +2594,7 @@
     </p:spTree>
     <p:extLst>
       <p:ext uri="{BB962C8B-B14F-4D97-AF65-F5344CB8AC3E}">
-        <p14:creationId xmlns:p14="http://schemas.microsoft.com/office/powerpoint/2010/main" val="3658240139"/>
+        <p14:creationId xmlns:p14="http://schemas.microsoft.com/office/powerpoint/2010/main" xmlns="" val="3658240139"/>
       </p:ext>
     </p:extLst>
   </p:cSld>
@@ -2739,7 +2761,8 @@
           <a:p>
             <a:fld id="{44442084-CD32-4B52-A5E8-3FB177862133}" type="datetimeFigureOut">
               <a:rPr lang="en-US" smtClean="0"/>
-              <a:t>1/7/2023</a:t>
+              <a:pPr/>
+              <a:t>7/30/2024</a:t>
             </a:fld>
             <a:endParaRPr lang="en-US"/>
           </a:p>
@@ -2817,6 +2840,7 @@
           <a:p>
             <a:fld id="{C3D15093-A077-459F-85BC-3B708B9DBCBD}" type="slidenum">
               <a:rPr lang="en-US" smtClean="0"/>
+              <a:pPr/>
               <a:t>‹#›</a:t>
             </a:fld>
             <a:endParaRPr lang="en-US"/>
@@ -2826,7 +2850,7 @@
     </p:spTree>
     <p:extLst>
       <p:ext uri="{BB962C8B-B14F-4D97-AF65-F5344CB8AC3E}">
-        <p14:creationId xmlns:p14="http://schemas.microsoft.com/office/powerpoint/2010/main" val="4233169690"/>
+        <p14:creationId xmlns:p14="http://schemas.microsoft.com/office/powerpoint/2010/main" xmlns="" val="4233169690"/>
       </p:ext>
     </p:extLst>
   </p:cSld>
@@ -3173,7 +3197,7 @@
     </p:spTree>
     <p:extLst>
       <p:ext uri="{BB962C8B-B14F-4D97-AF65-F5344CB8AC3E}">
-        <p14:creationId xmlns:p14="http://schemas.microsoft.com/office/powerpoint/2010/main" val="2672920108"/>
+        <p14:creationId xmlns:p14="http://schemas.microsoft.com/office/powerpoint/2010/main" xmlns="" val="2672920108"/>
       </p:ext>
     </p:extLst>
   </p:cSld>
@@ -3226,24 +3250,34 @@
               <a:buNone/>
             </a:pPr>
             <a:r>
-              <a:rPr lang="zh-CN" altLang="en-US" sz="6400" b="1" dirty="0">
+              <a:rPr lang="zh-CN" altLang="en-US" sz="6400" b="1" dirty="0" smtClean="0">
                 <a:solidFill>
                   <a:srgbClr val="000066"/>
                 </a:solidFill>
                 <a:latin typeface="Microsoft JhengHei" panose="020B0604030504040204" pitchFamily="34" charset="-120"/>
                 <a:ea typeface="Microsoft JhengHei" panose="020B0604030504040204" pitchFamily="34" charset="-120"/>
               </a:rPr>
-              <a:t>袮</a:t>
-            </a:r>
-            <a:r>
-              <a:rPr lang="zh-TW" altLang="en-US" sz="6400" b="1" dirty="0">
+              <a:t>祢</a:t>
+            </a:r>
+            <a:r>
+              <a:rPr lang="zh-TW" altLang="en-US" sz="6400" b="1" dirty="0" smtClean="0">
                 <a:solidFill>
                   <a:srgbClr val="000066"/>
                 </a:solidFill>
                 <a:latin typeface="Microsoft JhengHei" panose="020B0604030504040204" pitchFamily="34" charset="-120"/>
                 <a:ea typeface="Microsoft JhengHei" panose="020B0604030504040204" pitchFamily="34" charset="-120"/>
               </a:rPr>
-              <a:t>是我的主  引我走正義路</a:t>
+              <a:t>是</a:t>
+            </a:r>
+            <a:r>
+              <a:rPr lang="zh-TW" altLang="en-US" sz="6400" b="1" dirty="0">
+                <a:solidFill>
+                  <a:srgbClr val="000066"/>
+                </a:solidFill>
+                <a:latin typeface="Microsoft JhengHei" panose="020B0604030504040204" pitchFamily="34" charset="-120"/>
+                <a:ea typeface="Microsoft JhengHei" panose="020B0604030504040204" pitchFamily="34" charset="-120"/>
+              </a:rPr>
+              <a:t>我的主  引我走正義路</a:t>
             </a:r>
             <a:endParaRPr lang="en-US" altLang="zh-TW" sz="6400" b="1" dirty="0">
               <a:solidFill>
@@ -3265,27 +3299,47 @@
                 <a:latin typeface="Microsoft JhengHei" panose="020B0604030504040204" pitchFamily="34" charset="-120"/>
                 <a:ea typeface="Microsoft JhengHei" panose="020B0604030504040204" pitchFamily="34" charset="-120"/>
               </a:rPr>
-              <a:t>高山或低谷  都是</a:t>
-            </a:r>
-            <a:r>
-              <a:rPr lang="zh-CN" altLang="en-US" sz="6400" b="1" dirty="0">
+              <a:t>高山或低谷  都</a:t>
+            </a:r>
+            <a:r>
+              <a:rPr lang="zh-TW" altLang="en-US" sz="6400" b="1" dirty="0" smtClean="0">
                 <a:solidFill>
                   <a:srgbClr val="000066"/>
                 </a:solidFill>
                 <a:latin typeface="Microsoft JhengHei" panose="020B0604030504040204" pitchFamily="34" charset="-120"/>
                 <a:ea typeface="Microsoft JhengHei" panose="020B0604030504040204" pitchFamily="34" charset="-120"/>
               </a:rPr>
-              <a:t>袮</a:t>
-            </a:r>
-            <a:r>
-              <a:rPr lang="zh-TW" altLang="en-US" sz="6400" b="1" dirty="0">
+              <a:t>是</a:t>
+            </a:r>
+            <a:r>
+              <a:rPr lang="zh-CN" altLang="en-US" sz="6400" b="1" dirty="0" smtClean="0">
                 <a:solidFill>
                   <a:srgbClr val="000066"/>
                 </a:solidFill>
                 <a:latin typeface="Microsoft JhengHei" panose="020B0604030504040204" pitchFamily="34" charset="-120"/>
                 <a:ea typeface="Microsoft JhengHei" panose="020B0604030504040204" pitchFamily="34" charset="-120"/>
               </a:rPr>
-              <a:t>在保護</a:t>
+              <a:t>祢</a:t>
+            </a:r>
+            <a:r>
+              <a:rPr lang="zh-TW" altLang="en-US" sz="6400" b="1" dirty="0" smtClean="0">
+                <a:solidFill>
+                  <a:srgbClr val="000066"/>
+                </a:solidFill>
+                <a:latin typeface="Microsoft JhengHei" panose="020B0604030504040204" pitchFamily="34" charset="-120"/>
+                <a:ea typeface="Microsoft JhengHei" panose="020B0604030504040204" pitchFamily="34" charset="-120"/>
+              </a:rPr>
+              <a:t>在</a:t>
+            </a:r>
+            <a:r>
+              <a:rPr lang="zh-TW" altLang="en-US" sz="6400" b="1" dirty="0">
+                <a:solidFill>
+                  <a:srgbClr val="000066"/>
+                </a:solidFill>
+                <a:latin typeface="Microsoft JhengHei" panose="020B0604030504040204" pitchFamily="34" charset="-120"/>
+                <a:ea typeface="Microsoft JhengHei" panose="020B0604030504040204" pitchFamily="34" charset="-120"/>
+              </a:rPr>
+              <a:t>保護</a:t>
             </a:r>
             <a:endParaRPr lang="en-US" altLang="zh-TW" sz="6400" b="1" dirty="0">
               <a:solidFill>
@@ -3333,7 +3387,7 @@
               <a:t>( </a:t>
             </a:r>
             <a:r>
-              <a:rPr lang="zh-CN" altLang="en-US" sz="4000" b="1" dirty="0">
+              <a:rPr lang="zh-CN" altLang="en-US" sz="4000" b="1" dirty="0" smtClean="0">
                 <a:solidFill>
                   <a:srgbClr val="000066"/>
                 </a:solidFill>
@@ -3342,7 +3396,7 @@
                 <a:ea typeface="Microsoft JhengHei" panose="020B0604030504040204" pitchFamily="34" charset="-120"/>
                 <a:cs typeface="Microsoft Himalaya" panose="01010100010101010101" pitchFamily="2" charset="0"/>
               </a:rPr>
-              <a:t>正 </a:t>
+              <a:t>正歌 </a:t>
             </a:r>
             <a:r>
               <a:rPr lang="en-US" sz="4000" b="1" dirty="0">
@@ -3371,7 +3425,7 @@
     </p:spTree>
     <p:extLst>
       <p:ext uri="{BB962C8B-B14F-4D97-AF65-F5344CB8AC3E}">
-        <p14:creationId xmlns:p14="http://schemas.microsoft.com/office/powerpoint/2010/main" val="3946626478"/>
+        <p14:creationId xmlns:p14="http://schemas.microsoft.com/office/powerpoint/2010/main" xmlns="" val="3946626478"/>
       </p:ext>
     </p:extLst>
   </p:cSld>
@@ -3446,24 +3500,34 @@
               <a:buNone/>
             </a:pPr>
             <a:r>
-              <a:rPr lang="zh-CN" altLang="en-US" sz="6400" b="1" dirty="0">
+              <a:rPr lang="zh-CN" altLang="en-US" sz="6400" b="1" dirty="0" smtClean="0">
                 <a:solidFill>
                   <a:srgbClr val="000066"/>
                 </a:solidFill>
                 <a:latin typeface="Microsoft JhengHei" panose="020B0604030504040204" pitchFamily="34" charset="-120"/>
                 <a:ea typeface="Microsoft JhengHei" panose="020B0604030504040204" pitchFamily="34" charset="-120"/>
               </a:rPr>
-              <a:t>袮</a:t>
-            </a:r>
-            <a:r>
-              <a:rPr lang="zh-TW" altLang="en-US" sz="6400" b="1" dirty="0">
+              <a:t>祢</a:t>
+            </a:r>
+            <a:r>
+              <a:rPr lang="zh-TW" altLang="en-US" sz="6400" b="1" dirty="0" smtClean="0">
                 <a:solidFill>
                   <a:srgbClr val="000066"/>
                 </a:solidFill>
                 <a:latin typeface="Microsoft JhengHei" panose="020B0604030504040204" pitchFamily="34" charset="-120"/>
                 <a:ea typeface="Microsoft JhengHei" panose="020B0604030504040204" pitchFamily="34" charset="-120"/>
               </a:rPr>
-              <a:t>愛我認識我</a:t>
+              <a:t>愛</a:t>
+            </a:r>
+            <a:r>
+              <a:rPr lang="zh-TW" altLang="en-US" sz="6400" b="1" dirty="0">
+                <a:solidFill>
+                  <a:srgbClr val="000066"/>
+                </a:solidFill>
+                <a:latin typeface="Microsoft JhengHei" panose="020B0604030504040204" pitchFamily="34" charset="-120"/>
+                <a:ea typeface="Microsoft JhengHei" panose="020B0604030504040204" pitchFamily="34" charset="-120"/>
+              </a:rPr>
+              <a:t>我認識我</a:t>
             </a:r>
             <a:endParaRPr lang="en-US" sz="6400" b="1" dirty="0">
               <a:solidFill>
@@ -3499,7 +3563,7 @@
           <a:p>
             <a:pPr algn="ctr"/>
             <a:r>
-              <a:rPr lang="en-US" sz="4000" b="1" dirty="0">
+              <a:rPr lang="en-US" sz="4000" b="1" dirty="0" smtClean="0">
                 <a:solidFill>
                   <a:srgbClr val="000066"/>
                 </a:solidFill>
@@ -3510,7 +3574,7 @@
               <a:t>( </a:t>
             </a:r>
             <a:r>
-              <a:rPr lang="zh-CN" altLang="en-US" sz="4000" b="1" dirty="0">
+              <a:rPr lang="zh-CN" altLang="en-US" sz="4000" b="1" dirty="0" smtClean="0">
                 <a:solidFill>
                   <a:srgbClr val="000066"/>
                 </a:solidFill>
@@ -3518,10 +3582,10 @@
                 <a:ea typeface="Microsoft JhengHei" panose="020B0604030504040204" pitchFamily="34" charset="-120"/>
                 <a:cs typeface="Microsoft Himalaya" panose="01010100010101010101" pitchFamily="2" charset="0"/>
               </a:rPr>
-              <a:t>正 </a:t>
-            </a:r>
-            <a:r>
-              <a:rPr lang="en-US" sz="4000" b="1" dirty="0">
+              <a:t>正歌 </a:t>
+            </a:r>
+            <a:r>
+              <a:rPr lang="en-US" sz="4000" b="1" dirty="0" smtClean="0">
                 <a:solidFill>
                   <a:srgbClr val="000066"/>
                 </a:solidFill>
@@ -3545,7 +3609,7 @@
     </p:spTree>
     <p:extLst>
       <p:ext uri="{BB962C8B-B14F-4D97-AF65-F5344CB8AC3E}">
-        <p14:creationId xmlns:p14="http://schemas.microsoft.com/office/powerpoint/2010/main" val="3798343147"/>
+        <p14:creationId xmlns:p14="http://schemas.microsoft.com/office/powerpoint/2010/main" xmlns="" val="3798343147"/>
       </p:ext>
     </p:extLst>
   </p:cSld>
@@ -3663,7 +3727,7 @@
           <a:p>
             <a:pPr algn="ctr"/>
             <a:r>
-              <a:rPr lang="en-US" sz="4000" b="1" dirty="0">
+              <a:rPr lang="en-US" sz="4000" b="1" dirty="0" smtClean="0">
                 <a:solidFill>
                   <a:srgbClr val="000066"/>
                 </a:solidFill>
@@ -3674,7 +3738,7 @@
               <a:t>( </a:t>
             </a:r>
             <a:r>
-              <a:rPr lang="zh-CN" altLang="en-US" sz="4000" b="1" dirty="0">
+              <a:rPr lang="zh-CN" altLang="en-US" sz="4000" b="1" dirty="0" smtClean="0">
                 <a:solidFill>
                   <a:srgbClr val="000066"/>
                 </a:solidFill>
@@ -3682,10 +3746,10 @@
                 <a:ea typeface="Microsoft JhengHei" panose="020B0604030504040204" pitchFamily="34" charset="-120"/>
                 <a:cs typeface="Microsoft Himalaya" panose="01010100010101010101" pitchFamily="2" charset="0"/>
               </a:rPr>
-              <a:t>正 </a:t>
-            </a:r>
-            <a:r>
-              <a:rPr lang="en-US" sz="4000" b="1" dirty="0">
+              <a:t>正歌 </a:t>
+            </a:r>
+            <a:r>
+              <a:rPr lang="en-US" sz="4000" b="1" dirty="0" smtClean="0">
                 <a:solidFill>
                   <a:srgbClr val="000066"/>
                 </a:solidFill>
@@ -3709,7 +3773,7 @@
     </p:spTree>
     <p:extLst>
       <p:ext uri="{BB962C8B-B14F-4D97-AF65-F5344CB8AC3E}">
-        <p14:creationId xmlns:p14="http://schemas.microsoft.com/office/powerpoint/2010/main" val="2986388433"/>
+        <p14:creationId xmlns:p14="http://schemas.microsoft.com/office/powerpoint/2010/main" xmlns="" val="2986388433"/>
       </p:ext>
     </p:extLst>
   </p:cSld>
@@ -3784,17 +3848,17 @@
               <a:buNone/>
             </a:pPr>
             <a:r>
-              <a:rPr lang="zh-CN" altLang="en-US" sz="6400" b="1" dirty="0">
+              <a:rPr lang="zh-CN" altLang="en-US" sz="6400" b="1" dirty="0" smtClean="0">
                 <a:solidFill>
                   <a:srgbClr val="000066"/>
                 </a:solidFill>
                 <a:latin typeface="Microsoft JhengHei" panose="020B0604030504040204" pitchFamily="34" charset="-120"/>
                 <a:ea typeface="Microsoft JhengHei" panose="020B0604030504040204" pitchFamily="34" charset="-120"/>
               </a:rPr>
-              <a:t>袮</a:t>
-            </a:r>
-            <a:r>
-              <a:rPr lang="zh-TW" altLang="en-US" sz="6400" b="1" dirty="0">
+              <a:t>祢</a:t>
+            </a:r>
+            <a:r>
+              <a:rPr lang="zh-TW" altLang="en-US" sz="6400" b="1" dirty="0" smtClean="0">
                 <a:solidFill>
                   <a:srgbClr val="000066"/>
                 </a:solidFill>
@@ -3804,24 +3868,34 @@
               <a:t>愛  </a:t>
             </a:r>
             <a:r>
-              <a:rPr lang="zh-CN" altLang="en-US" sz="6400" b="1" dirty="0">
+              <a:rPr lang="zh-CN" altLang="en-US" sz="6400" b="1" dirty="0" smtClean="0">
                 <a:solidFill>
                   <a:srgbClr val="000066"/>
                 </a:solidFill>
                 <a:latin typeface="Microsoft JhengHei" panose="020B0604030504040204" pitchFamily="34" charset="-120"/>
                 <a:ea typeface="Microsoft JhengHei" panose="020B0604030504040204" pitchFamily="34" charset="-120"/>
               </a:rPr>
-              <a:t>袮</a:t>
-            </a:r>
-            <a:r>
-              <a:rPr lang="zh-TW" altLang="en-US" sz="6400" b="1" dirty="0">
+              <a:t>祢</a:t>
+            </a:r>
+            <a:r>
+              <a:rPr lang="zh-TW" altLang="en-US" sz="6400" b="1" dirty="0" smtClean="0">
                 <a:solidFill>
                   <a:srgbClr val="000066"/>
                 </a:solidFill>
                 <a:latin typeface="Microsoft JhengHei" panose="020B0604030504040204" pitchFamily="34" charset="-120"/>
                 <a:ea typeface="Microsoft JhengHei" panose="020B0604030504040204" pitchFamily="34" charset="-120"/>
               </a:rPr>
-              <a:t>手  將我緊緊抓住</a:t>
+              <a:t>手  </a:t>
+            </a:r>
+            <a:r>
+              <a:rPr lang="zh-TW" altLang="en-US" sz="6400" b="1" dirty="0">
+                <a:solidFill>
+                  <a:srgbClr val="000066"/>
+                </a:solidFill>
+                <a:latin typeface="Microsoft JhengHei" panose="020B0604030504040204" pitchFamily="34" charset="-120"/>
+                <a:ea typeface="Microsoft JhengHei" panose="020B0604030504040204" pitchFamily="34" charset="-120"/>
+              </a:rPr>
+              <a:t>將我緊緊抓住</a:t>
             </a:r>
             <a:endParaRPr lang="en-US" altLang="zh-TW" sz="6400" b="1" dirty="0">
               <a:solidFill>
@@ -3868,7 +3942,7 @@
               <a:t>( </a:t>
             </a:r>
             <a:r>
-              <a:rPr lang="zh-CN" altLang="en-US" sz="4000" b="1" dirty="0">
+              <a:rPr lang="zh-CN" altLang="en-US" sz="4000" b="1" dirty="0" smtClean="0">
                 <a:solidFill>
                   <a:srgbClr val="000066"/>
                 </a:solidFill>
@@ -3876,7 +3950,7 @@
                 <a:ea typeface="Microsoft JhengHei" panose="020B0604030504040204" pitchFamily="34" charset="-120"/>
                 <a:cs typeface="Microsoft Himalaya" panose="01010100010101010101" pitchFamily="2" charset="0"/>
               </a:rPr>
-              <a:t>副 </a:t>
+              <a:t>副歌 </a:t>
             </a:r>
             <a:r>
               <a:rPr lang="en-US" sz="4000" b="1" dirty="0">
@@ -3903,7 +3977,7 @@
     </p:spTree>
     <p:extLst>
       <p:ext uri="{BB962C8B-B14F-4D97-AF65-F5344CB8AC3E}">
-        <p14:creationId xmlns:p14="http://schemas.microsoft.com/office/powerpoint/2010/main" val="2691004410"/>
+        <p14:creationId xmlns:p14="http://schemas.microsoft.com/office/powerpoint/2010/main" xmlns="" val="2691004410"/>
       </p:ext>
     </p:extLst>
   </p:cSld>
@@ -3978,17 +4052,17 @@
               <a:buNone/>
             </a:pPr>
             <a:r>
-              <a:rPr lang="zh-CN" altLang="en-US" sz="6400" b="1" dirty="0">
+              <a:rPr lang="zh-CN" altLang="en-US" sz="6400" b="1" dirty="0" smtClean="0">
                 <a:solidFill>
                   <a:srgbClr val="000066"/>
                 </a:solidFill>
                 <a:latin typeface="Microsoft JhengHei" panose="020B0604030504040204" pitchFamily="34" charset="-120"/>
                 <a:ea typeface="Microsoft JhengHei" panose="020B0604030504040204" pitchFamily="34" charset="-120"/>
               </a:rPr>
-              <a:t>袮</a:t>
-            </a:r>
-            <a:r>
-              <a:rPr lang="zh-TW" altLang="en-US" sz="6400" b="1" dirty="0">
+              <a:t>祢</a:t>
+            </a:r>
+            <a:r>
+              <a:rPr lang="zh-TW" altLang="en-US" sz="6400" b="1" dirty="0" smtClean="0">
                 <a:solidFill>
                   <a:srgbClr val="000066"/>
                 </a:solidFill>
@@ -3998,24 +4072,34 @@
               <a:t>愛  </a:t>
             </a:r>
             <a:r>
-              <a:rPr lang="zh-CN" altLang="en-US" sz="6400" b="1" dirty="0">
+              <a:rPr lang="zh-CN" altLang="en-US" sz="6400" b="1" dirty="0" smtClean="0">
                 <a:solidFill>
                   <a:srgbClr val="000066"/>
                 </a:solidFill>
                 <a:latin typeface="Microsoft JhengHei" panose="020B0604030504040204" pitchFamily="34" charset="-120"/>
                 <a:ea typeface="Microsoft JhengHei" panose="020B0604030504040204" pitchFamily="34" charset="-120"/>
               </a:rPr>
-              <a:t>袮</a:t>
-            </a:r>
-            <a:r>
-              <a:rPr lang="zh-TW" altLang="en-US" sz="6400" b="1" dirty="0">
+              <a:t>祢</a:t>
+            </a:r>
+            <a:r>
+              <a:rPr lang="zh-TW" altLang="en-US" sz="6400" b="1" dirty="0" smtClean="0">
                 <a:solidFill>
                   <a:srgbClr val="000066"/>
                 </a:solidFill>
                 <a:latin typeface="Microsoft JhengHei" panose="020B0604030504040204" pitchFamily="34" charset="-120"/>
                 <a:ea typeface="Microsoft JhengHei" panose="020B0604030504040204" pitchFamily="34" charset="-120"/>
               </a:rPr>
-              <a:t>手  牽引我走這人生路</a:t>
+              <a:t>手  </a:t>
+            </a:r>
+            <a:r>
+              <a:rPr lang="zh-TW" altLang="en-US" sz="6400" b="1" dirty="0">
+                <a:solidFill>
+                  <a:srgbClr val="000066"/>
+                </a:solidFill>
+                <a:latin typeface="Microsoft JhengHei" panose="020B0604030504040204" pitchFamily="34" charset="-120"/>
+                <a:ea typeface="Microsoft JhengHei" panose="020B0604030504040204" pitchFamily="34" charset="-120"/>
+              </a:rPr>
+              <a:t>牽引我走這人生路</a:t>
             </a:r>
             <a:endParaRPr lang="en-US" sz="6400" b="1" dirty="0">
               <a:solidFill>
@@ -4051,7 +4135,7 @@
           <a:p>
             <a:pPr algn="ctr"/>
             <a:r>
-              <a:rPr lang="en-US" sz="4000" b="1" dirty="0">
+              <a:rPr lang="en-US" sz="4000" b="1" dirty="0" smtClean="0">
                 <a:solidFill>
                   <a:srgbClr val="000066"/>
                 </a:solidFill>
@@ -4062,7 +4146,7 @@
               <a:t>( </a:t>
             </a:r>
             <a:r>
-              <a:rPr lang="zh-CN" altLang="en-US" sz="4000" b="1" dirty="0">
+              <a:rPr lang="zh-CN" altLang="en-US" sz="4000" b="1" dirty="0" smtClean="0">
                 <a:solidFill>
                   <a:srgbClr val="000066"/>
                 </a:solidFill>
@@ -4070,10 +4154,10 @@
                 <a:ea typeface="Microsoft JhengHei" panose="020B0604030504040204" pitchFamily="34" charset="-120"/>
                 <a:cs typeface="Microsoft Himalaya" panose="01010100010101010101" pitchFamily="2" charset="0"/>
               </a:rPr>
-              <a:t>副 </a:t>
-            </a:r>
-            <a:r>
-              <a:rPr lang="en-US" sz="4000" b="1" dirty="0">
+              <a:t>副歌 </a:t>
+            </a:r>
+            <a:r>
+              <a:rPr lang="en-US" sz="4000" b="1" dirty="0" smtClean="0">
                 <a:solidFill>
                   <a:srgbClr val="000066"/>
                 </a:solidFill>
@@ -4097,7 +4181,7 @@
     </p:spTree>
     <p:extLst>
       <p:ext uri="{BB962C8B-B14F-4D97-AF65-F5344CB8AC3E}">
-        <p14:creationId xmlns:p14="http://schemas.microsoft.com/office/powerpoint/2010/main" val="1709459496"/>
+        <p14:creationId xmlns:p14="http://schemas.microsoft.com/office/powerpoint/2010/main" xmlns="" val="1709459496"/>
       </p:ext>
     </p:extLst>
   </p:cSld>
